--- a/soutenance/Soutenance_M2_Lamia_BELKADI.pptx
+++ b/soutenance/Soutenance_M2_Lamia_BELKADI.pptx
@@ -142,6 +142,43 @@
     </p:ext>
   </p:extLst>
 </p:presentation>
+</file>
+
+<file path=ppt/changesInfos/changesInfo1.xml><?xml version="1.0" encoding="utf-8"?>
+<pc:chgInfo xmlns:a="http://schemas.openxmlformats.org/drawingml/2006/main" xmlns:r="http://schemas.openxmlformats.org/officeDocument/2006/relationships" xmlns:ac="http://schemas.microsoft.com/office/drawing/2013/main/command" xmlns:pc="http://schemas.microsoft.com/office/powerpoint/2013/main/command">
+  <pc:docChgLst>
+    <pc:chgData name="belkadilamia38@gmail.com" userId="9f108d9e66bca781" providerId="LiveId" clId="{C73868B1-E9D4-4CF0-A564-837D6ED2CD07}"/>
+    <pc:docChg chg="undo custSel modSld">
+      <pc:chgData name="belkadilamia38@gmail.com" userId="9f108d9e66bca781" providerId="LiveId" clId="{C73868B1-E9D4-4CF0-A564-837D6ED2CD07}" dt="2026-08-07T19:08:57.717" v="12" actId="14100"/>
+      <pc:docMkLst>
+        <pc:docMk/>
+      </pc:docMkLst>
+      <pc:sldChg chg="addSp delSp modSp mod">
+        <pc:chgData name="belkadilamia38@gmail.com" userId="9f108d9e66bca781" providerId="LiveId" clId="{C73868B1-E9D4-4CF0-A564-837D6ED2CD07}" dt="2026-08-07T19:08:57.717" v="12" actId="14100"/>
+        <pc:sldMkLst>
+          <pc:docMk/>
+          <pc:sldMk cId="0" sldId="260"/>
+        </pc:sldMkLst>
+        <pc:picChg chg="del">
+          <ac:chgData name="belkadilamia38@gmail.com" userId="9f108d9e66bca781" providerId="LiveId" clId="{C73868B1-E9D4-4CF0-A564-837D6ED2CD07}" dt="2026-08-07T19:08:21.483" v="0" actId="478"/>
+          <ac:picMkLst>
+            <pc:docMk/>
+            <pc:sldMk cId="0" sldId="260"/>
+            <ac:picMk id="13" creationId="{00000000-0000-0000-0000-000000000000}"/>
+          </ac:picMkLst>
+        </pc:picChg>
+        <pc:picChg chg="add mod">
+          <ac:chgData name="belkadilamia38@gmail.com" userId="9f108d9e66bca781" providerId="LiveId" clId="{C73868B1-E9D4-4CF0-A564-837D6ED2CD07}" dt="2026-08-07T19:08:57.717" v="12" actId="14100"/>
+          <ac:picMkLst>
+            <pc:docMk/>
+            <pc:sldMk cId="0" sldId="260"/>
+            <ac:picMk id="15" creationId="{97253AC9-6480-076E-291F-E3F2F5F1D634}"/>
+          </ac:picMkLst>
+        </pc:picChg>
+      </pc:sldChg>
+    </pc:docChg>
+  </pc:docChgLst>
+</pc:chgInfo>
 </file>
 
 <file path=ppt/notesMasters/notesMaster1.xml><?xml version="1.0" encoding="utf-8"?>
@@ -25758,7 +25795,13 @@
       </p:sp>
       <p:pic>
         <p:nvPicPr>
-          <p:cNvPr id="13" name="Image 0" descr="assets/orgchart.jpeg"/>
+          <p:cNvPr id="15" name="Image 14">
+            <a:extLst>
+              <a:ext uri="{FF2B5EF4-FFF2-40B4-BE49-F238E27FC236}">
+                <a16:creationId xmlns:a16="http://schemas.microsoft.com/office/drawing/2014/main" id="{97253AC9-6480-076E-291F-E3F2F5F1D634}"/>
+              </a:ext>
+            </a:extLst>
+          </p:cNvPr>
           <p:cNvPicPr>
             <a:picLocks noChangeAspect="1"/>
           </p:cNvPicPr>
@@ -25772,8 +25815,8 @@
         </p:blipFill>
         <p:spPr>
           <a:xfrm>
-            <a:off x="6080760" y="2720226"/>
-            <a:ext cx="5394960" cy="2834867"/>
+            <a:off x="6035039" y="2679192"/>
+            <a:ext cx="5623561" cy="3063882"/>
           </a:xfrm>
           <a:prstGeom prst="rect">
             <a:avLst/>
